--- a/dist/초4/국어/읽기와요약/초4_국어_읽기와요약_01_문단과문단의관계_학생용.pptx
+++ b/dist/초4/국어/읽기와요약/초4_국어_읽기와요약_01_문단과문단의관계_학생용.pptx
@@ -120,13 +120,13 @@
   <p:extLst>
     <p:ext uri="{521415D9-36F7-43E2-AB2F-B90AF26B5E84}">
       <p14:sectionLst xmlns:p14="http://schemas.microsoft.com/office/powerpoint/2010/main">
-        <p14:section name="도입" id="{aa6cb70c-4a28-739f-cc3f-29431d2fb16c}">
+        <p14:section name="도입" id="{d564d908-32fa-32ca-2d37-eabf18f65f1d}">
           <p14:sldIdLst>
             <p14:sldId id="256"/>
             <p14:sldId id="257"/>
           </p14:sldIdLst>
         </p14:section>
-        <p14:section name="개념" id="{9bd434a9-578e-a1cf-8d61-bc7f1a3e66f4}">
+        <p14:section name="개념" id="{37e85b74-9b72-6c89-ddc8-74d8f05b7440}">
           <p14:sldIdLst>
             <p14:sldId id="258"/>
             <p14:sldId id="259"/>
@@ -135,25 +135,25 @@
             <p14:sldId id="262"/>
           </p14:sldIdLst>
         </p14:section>
-        <p14:section name="연습" id="{317419f5-beb6-53ac-5b8e-05c05f1f3e96}">
+        <p14:section name="연습" id="{a65c39ac-b8b4-2673-2d62-f061163a1726}">
           <p14:sldIdLst>
             <p14:sldId id="263"/>
             <p14:sldId id="264"/>
             <p14:sldId id="265"/>
           </p14:sldIdLst>
         </p14:section>
-        <p14:section name="확인" id="{871fc0e5-5da5-637a-9e41-07eb3bbe489c}">
+        <p14:section name="확인" id="{49e5f5bf-449a-cbbe-dfe5-52f3eca2e96d}">
           <p14:sldIdLst>
             <p14:sldId id="266"/>
             <p14:sldId id="267"/>
           </p14:sldIdLst>
         </p14:section>
-        <p14:section name="정리" id="{24d4eea5-2313-589e-d11f-fd53a0bc6b4e}">
+        <p14:section name="정리" id="{d04be0cd-97a9-4fc4-7924-549ededb1234}">
           <p14:sldIdLst>
             <p14:sldId id="268"/>
           </p14:sldIdLst>
         </p14:section>
-        <p14:section name="보충" id="{4896d572-25b5-f2fa-c50f-36c9bf1073c0}">
+        <p14:section name="보충" id="{6df29c3c-f38d-f3ce-9653-60cb8db24400}">
           <p14:sldIdLst>
             <p14:sldId id="269"/>
           </p14:sldIdLst>
@@ -5982,7 +5982,7 @@
           </p:nvPr>
         </p:nvGraphicFramePr>
         <p:xfrm>
-          <a:off x="836676" y="2166620"/>
+          <a:off x="836676" y="2199640"/>
           <a:ext cx="10515600" cy="914400"/>
         </p:xfrm>
         <a:graphic>
@@ -5994,7 +5994,7 @@
                 <a:gridCol w="2103120"/>
                 <a:gridCol w="7255764"/>
               </a:tblGrid>
-              <a:tr h="528320">
+              <a:tr h="511810">
                 <a:tc>
                   <a:txBody>
                     <a:bodyPr/>
@@ -6200,7 +6200,7 @@
                   </a:tcPr>
                 </a:tc>
               </a:tr>
-              <a:tr h="528320">
+              <a:tr h="511810">
                 <a:tc>
                   <a:txBody>
                     <a:bodyPr/>
@@ -6395,7 +6395,7 @@
                   </a:tcPr>
                 </a:tc>
               </a:tr>
-              <a:tr h="528320">
+              <a:tr h="511810">
                 <a:tc>
                   <a:txBody>
                     <a:bodyPr/>
@@ -6601,7 +6601,7 @@
                   </a:tcPr>
                 </a:tc>
               </a:tr>
-              <a:tr h="528320">
+              <a:tr h="511810">
                 <a:tc>
                   <a:txBody>
                     <a:bodyPr/>

--- a/dist/초4/국어/읽기와요약/초4_국어_읽기와요약_01_문단과문단의관계_학생용.pptx
+++ b/dist/초4/국어/읽기와요약/초4_국어_읽기와요약_01_문단과문단의관계_학생용.pptx
@@ -120,13 +120,13 @@
   <p:extLst>
     <p:ext uri="{521415D9-36F7-43E2-AB2F-B90AF26B5E84}">
       <p14:sectionLst xmlns:p14="http://schemas.microsoft.com/office/powerpoint/2010/main">
-        <p14:section name="도입" id="{d564d908-32fa-32ca-2d37-eabf18f65f1d}">
+        <p14:section name="도입" id="{4e2a4765-9ead-f7f7-ef24-5bcbbd1c0cd9}">
           <p14:sldIdLst>
             <p14:sldId id="256"/>
             <p14:sldId id="257"/>
           </p14:sldIdLst>
         </p14:section>
-        <p14:section name="개념" id="{37e85b74-9b72-6c89-ddc8-74d8f05b7440}">
+        <p14:section name="개념" id="{fa599d29-795e-5273-b229-cc9c0ccf3cfb}">
           <p14:sldIdLst>
             <p14:sldId id="258"/>
             <p14:sldId id="259"/>
@@ -135,25 +135,25 @@
             <p14:sldId id="262"/>
           </p14:sldIdLst>
         </p14:section>
-        <p14:section name="연습" id="{a65c39ac-b8b4-2673-2d62-f061163a1726}">
+        <p14:section name="연습" id="{05cf54e1-ac05-8830-59c6-c515f32dca61}">
           <p14:sldIdLst>
             <p14:sldId id="263"/>
             <p14:sldId id="264"/>
             <p14:sldId id="265"/>
           </p14:sldIdLst>
         </p14:section>
-        <p14:section name="확인" id="{49e5f5bf-449a-cbbe-dfe5-52f3eca2e96d}">
+        <p14:section name="확인" id="{978ff692-4619-731b-c9ec-b881655210f7}">
           <p14:sldIdLst>
             <p14:sldId id="266"/>
             <p14:sldId id="267"/>
           </p14:sldIdLst>
         </p14:section>
-        <p14:section name="정리" id="{d04be0cd-97a9-4fc4-7924-549ededb1234}">
+        <p14:section name="정리" id="{b62c4bd8-5b26-976d-12b4-031211f0b999}">
           <p14:sldIdLst>
             <p14:sldId id="268"/>
           </p14:sldIdLst>
         </p14:section>
-        <p14:section name="보충" id="{6df29c3c-f38d-f3ce-9653-60cb8db24400}">
+        <p14:section name="보충" id="{c0c9e628-7dbb-1d55-33ce-232e177318f0}">
           <p14:sldIdLst>
             <p14:sldId id="269"/>
           </p14:sldIdLst>
